--- a/supabase/sample/files/microbiology-slides.pptx
+++ b/supabase/sample/files/microbiology-slides.pptx
@@ -1148,7 +1148,7 @@
                   <a:srgbClr val="334155"/>
                 </a:solidFill>
               </a:rPr>
-              <a:t>MedNotes E-Library</a:t>
+              <a:t>Published by Fritz Rjhay Dela Cruz</a:t>
             </a:r>
             <a:endParaRPr lang="en-US" sz="2000" dirty="0"/>
           </a:p>

--- a/supabase/sample/files/microbiology-slides.pptx
+++ b/supabase/sample/files/microbiology-slides.pptx
@@ -1148,7 +1148,7 @@
                   <a:srgbClr val="334155"/>
                 </a:solidFill>
               </a:rPr>
-              <a:t>Published by Fritz Rjhay Dela Cruz</a:t>
+              <a:t>Published by MedNotes Publishing</a:t>
             </a:r>
             <a:endParaRPr lang="en-US" sz="2000" dirty="0"/>
           </a:p>
